--- a/Jueves-18/S02_Jueves-18_1_Carrusel_24h-a-tu-puerta_1x1.pptx
+++ b/Jueves-18/S02_Jueves-18_1_Carrusel_24h-a-tu-puerta_1x1.pptx
@@ -3178,7 +3178,7 @@
         <p:spPr>
           <a:xfrm>
             <a:off x="777240" y="777240"/>
-            <a:ext cx="1767078" cy="373380"/>
+            <a:ext cx="2772918" cy="373380"/>
           </a:xfrm>
           <a:prstGeom prst="roundRect">
             <a:avLst>
@@ -3219,7 +3219,7 @@
                 </a:solidFill>
                 <a:latin typeface="Inter"/>
               </a:rPr>
-              <a:t>FALTA MENOS</a:t>
+              <a:t>ENTREGA A DOMICILIO</a:t>
             </a:r>
           </a:p>
         </p:txBody>
@@ -3510,7 +3510,7 @@
                 </a:solidFill>
                 <a:latin typeface="Inter"/>
               </a:rPr>
-              <a:t>Recibes el original en casa.</a:t>
+              <a:t>Recibes el original sellado en casa.</a:t>
             </a:r>
           </a:p>
         </p:txBody>
@@ -3675,7 +3675,7 @@
         </p:nvSpPr>
         <p:spPr>
           <a:xfrm>
-            <a:off x="777240" y="1685036"/>
+            <a:off x="777240" y="1621536"/>
             <a:ext cx="1371600" cy="146304"/>
           </a:xfrm>
           <a:prstGeom prst="rect">
@@ -3719,8 +3719,8 @@
         </p:nvSpPr>
         <p:spPr>
           <a:xfrm>
-            <a:off x="777240" y="2142236"/>
-            <a:ext cx="6675120" cy="3213608"/>
+            <a:off x="777240" y="2078736"/>
+            <a:ext cx="6675120" cy="3340608"/>
           </a:xfrm>
           <a:prstGeom prst="rect">
             <a:avLst/>
@@ -3739,13 +3739,13 @@
               </a:lnSpc>
             </a:pPr>
             <a:r>
-              <a:rPr sz="9200" b="1">
+              <a:rPr sz="6400" b="1">
                 <a:solidFill>
                   <a:srgbClr val="FFFFFF"/>
                 </a:solidFill>
                 <a:latin typeface="Inter"/>
               </a:rPr>
-              <a:t>24 horas.</a:t>
+              <a:t>Pídelo ya en early access.</a:t>
             </a:r>
           </a:p>
         </p:txBody>
@@ -3758,8 +3758,8 @@
         </p:nvSpPr>
         <p:spPr>
           <a:xfrm>
-            <a:off x="777240" y="5355844"/>
-            <a:ext cx="6675120" cy="1118108"/>
+            <a:off x="777240" y="5419344"/>
+            <a:ext cx="6675120" cy="1530858"/>
           </a:xfrm>
           <a:prstGeom prst="rect">
             <a:avLst/>
@@ -3784,7 +3784,7 @@
                 </a:solidFill>
                 <a:latin typeface="Inter"/>
               </a:rPr>
-              <a:t>Cuenta regresiva: 4 días.</a:t>
+              <a:t>Lanzamiento oficial: 22-jun · notaly.com.ve</a:t>
             </a:r>
           </a:p>
         </p:txBody>

--- a/Jueves-18/S02_Jueves-18_1_Carrusel_24h-a-tu-puerta_1x1.pptx
+++ b/Jueves-18/S02_Jueves-18_1_Carrusel_24h-a-tu-puerta_1x1.pptx
@@ -3675,7 +3675,7 @@
         </p:nvSpPr>
         <p:spPr>
           <a:xfrm>
-            <a:off x="777240" y="1621536"/>
+            <a:off x="777240" y="1812036"/>
             <a:ext cx="1371600" cy="146304"/>
           </a:xfrm>
           <a:prstGeom prst="rect">
@@ -3719,8 +3719,8 @@
         </p:nvSpPr>
         <p:spPr>
           <a:xfrm>
-            <a:off x="777240" y="2078736"/>
-            <a:ext cx="6675120" cy="3340608"/>
+            <a:off x="777240" y="2269236"/>
+            <a:ext cx="6675120" cy="2959607"/>
           </a:xfrm>
           <a:prstGeom prst="rect">
             <a:avLst/>
@@ -3739,13 +3739,13 @@
               </a:lnSpc>
             </a:pPr>
             <a:r>
-              <a:rPr sz="6400" b="1">
+              <a:rPr sz="5600" b="1">
                 <a:solidFill>
                   <a:srgbClr val="FFFFFF"/>
                 </a:solidFill>
                 <a:latin typeface="Inter"/>
               </a:rPr>
-              <a:t>Pídelo ya en early access.</a:t>
+              <a:t>Te lo entregamos a tu puerta.</a:t>
             </a:r>
           </a:p>
         </p:txBody>
@@ -3758,7 +3758,7 @@
         </p:nvSpPr>
         <p:spPr>
           <a:xfrm>
-            <a:off x="777240" y="5419344"/>
+            <a:off x="777240" y="5228843"/>
             <a:ext cx="6675120" cy="1530858"/>
           </a:xfrm>
           <a:prstGeom prst="rect">
